--- a/decks/maths-directed/maths-directed_ch5_multiplying-dividing.pptx
+++ b/decks/maths-directed/maths-directed_ch5_multiplying-dividing.pptx
@@ -122,48 +122,48 @@
   <p:extLst>
     <p:ext uri="{521415D9-36F7-43E2-AB2F-B90AF26B5E84}">
       <p14:sectionLst xmlns:p14="http://schemas.microsoft.com/office/powerpoint/2010/main">
-        <p14:section name="Opening" id="{6853c1da-d255-85b8-d146-5bd9dfee57a1}">
+        <p14:section name="Opening" id="{358dae4c-cffb-ad92-00b8-776a2f7ebe2b}">
           <p14:sldIdLst>
             <p14:sldId id="256"/>
           </p14:sldIdLst>
         </p14:section>
-        <p14:section name="Gate" id="{ae63e3f7-f505-b9cf-8acb-8be756812f2a}">
+        <p14:section name="Gate" id="{978dccb9-9adc-b14b-5989-d0d803ac5a17}">
           <p14:sldIdLst>
             <p14:sldId id="257"/>
             <p14:sldId id="258"/>
           </p14:sldIdLst>
         </p14:section>
-        <p14:section name="Pre-teach" id="{acc8b255-6500-427d-fee3-46b7fa5493f4}">
+        <p14:section name="Pre-teach" id="{3fe6eed6-612a-f15f-2725-f9e1bbaeb685}">
           <p14:sldIdLst>
             <p14:sldId id="259"/>
           </p14:sldIdLst>
         </p14:section>
-        <p14:section name="Read-along" id="{8208d3f8-b3c1-8bfc-aa4c-c2689abb1d18}">
+        <p14:section name="Read-along" id="{a0f80de6-69db-d4d1-c32c-92da55ed4d85}">
           <p14:sldIdLst>
             <p14:sldId id="260"/>
             <p14:sldId id="261"/>
           </p14:sldIdLst>
         </p14:section>
-        <p14:section name="Teach" id="{b6b77ce4-1311-9d0f-61a4-19152eeea6dc}">
+        <p14:section name="Teach" id="{31f0f699-10b8-2c4d-49ea-71d33337f862}">
           <p14:sldIdLst>
             <p14:sldId id="262"/>
             <p14:sldId id="263"/>
             <p14:sldId id="264"/>
           </p14:sldIdLst>
         </p14:section>
-        <p14:section name="Routes" id="{e488d3d2-a043-454e-1698-1c37ad4f611b}">
+        <p14:section name="Routes" id="{d13050cc-6e05-cbaa-4be5-72ba346b4ecd}">
           <p14:sldIdLst>
             <p14:sldId id="265"/>
             <p14:sldId id="266"/>
             <p14:sldId id="267"/>
           </p14:sldIdLst>
         </p14:section>
-        <p14:section name="Close" id="{ccfb8219-fa39-a495-47f6-7b16771cb70e}">
+        <p14:section name="Close" id="{472ba978-8420-d95f-4c6d-55a95a204dd8}">
           <p14:sldIdLst>
             <p14:sldId id="268"/>
           </p14:sldIdLst>
         </p14:section>
-        <p14:section name="Answers" id="{7236de08-855b-3124-3124-170c9363e110}">
+        <p14:section name="Answers" id="{ccbc57a1-04c0-dd0a-20b2-25321cb9233d}">
           <p14:sldIdLst>
             <p14:sldId id="269"/>
             <p14:sldId id="270"/>
@@ -1314,8 +1314,8 @@
               <a:rPr lang="en-US" dirty="0"/>
               <a:t>Do now — retrieval. Silent, no notes, no help: recall comes before any support. Give about four minutes.
 1. Work out 4 × (−3).  →  −12
-2. Work out (−5) × (−6).  →  B   30
-3. Work out 24 ÷ (−8).  →  B   −3
+2. Work out (−5) × (−6).  →  A   30
+3. Work out 24 ÷ (−8).  →  D   −3
 Circulate: who gets 3/3 (Stretch route), 2/3 (Core), 0–1 (Support)? Use this to route pupils later in the lesson.</a:t>
             </a:r>
             <a:endParaRPr lang="en-US" dirty="0"/>
@@ -1406,8 +1406,8 @@
               <a:rPr lang="en-US" dirty="0"/>
               <a:t>Answers — pupils mark their own in a different colour, then hands up for 3/3, 2/3, 1/3.
 1. −12. 4 × 3 = 12, and different signs give a negative answer.
-2. B   30. 5 × 6 = 30, and two negatives multiplied give a positive.
-3. B   −3. 24 ÷ 8 = 3, and different signs give a negative answer.
+2. A   30. 5 × 6 = 30, and two negatives multiplied give a positive.
+3. D   −3. 24 ÷ 8 = 3, and different signs give a negative answer.
 Say the route each score points to: 3/3 Stretch, 2/3 Core, 0–1 Support. Pupils may choose to move up.</a:t>
             </a:r>
             <a:endParaRPr lang="en-US" dirty="0"/>
@@ -9297,7 +9297,7 @@
                 <a:ea typeface="Calibri" pitchFamily="34" charset="-122"/>
                 <a:cs typeface="Calibri" pitchFamily="34" charset="-120"/>
               </a:rPr>
-              <a:t>−30</a:t>
+              <a:t>30</a:t>
             </a:r>
             <a:endParaRPr lang="en-US" sz="2400" dirty="0"/>
           </a:p>
@@ -9334,7 +9334,7 @@
                 <a:ea typeface="Calibri" pitchFamily="34" charset="-122"/>
                 <a:cs typeface="Calibri" pitchFamily="34" charset="-120"/>
               </a:rPr>
-              <a:t>30</a:t>
+              <a:t>−11</a:t>
             </a:r>
             <a:endParaRPr lang="en-US" sz="2400" dirty="0"/>
           </a:p>
@@ -9371,7 +9371,7 @@
                 <a:ea typeface="Calibri" pitchFamily="34" charset="-122"/>
                 <a:cs typeface="Calibri" pitchFamily="34" charset="-120"/>
               </a:rPr>
-              <a:t>−11</a:t>
+              <a:t>11</a:t>
             </a:r>
             <a:endParaRPr lang="en-US" sz="2400" dirty="0"/>
           </a:p>
@@ -9408,7 +9408,7 @@
                 <a:ea typeface="Calibri" pitchFamily="34" charset="-122"/>
                 <a:cs typeface="Calibri" pitchFamily="34" charset="-120"/>
               </a:rPr>
-              <a:t>11</a:t>
+              <a:t>−30</a:t>
             </a:r>
             <a:endParaRPr lang="en-US" sz="2400" dirty="0"/>
           </a:p>
@@ -9612,7 +9612,7 @@
                 <a:ea typeface="Calibri" pitchFamily="34" charset="-122"/>
                 <a:cs typeface="Calibri" pitchFamily="34" charset="-120"/>
               </a:rPr>
-              <a:t>3</a:t>
+              <a:t>32</a:t>
             </a:r>
             <a:endParaRPr lang="en-US" sz="2400" dirty="0"/>
           </a:p>
@@ -9649,7 +9649,7 @@
                 <a:ea typeface="Calibri" pitchFamily="34" charset="-122"/>
                 <a:cs typeface="Calibri" pitchFamily="34" charset="-120"/>
               </a:rPr>
-              <a:t>−3</a:t>
+              <a:t>3</a:t>
             </a:r>
             <a:endParaRPr lang="en-US" sz="2400" dirty="0"/>
           </a:p>
@@ -9723,7 +9723,7 @@
                 <a:ea typeface="Calibri" pitchFamily="34" charset="-122"/>
                 <a:cs typeface="Calibri" pitchFamily="34" charset="-120"/>
               </a:rPr>
-              <a:t>32</a:t>
+              <a:t>−3</a:t>
             </a:r>
             <a:endParaRPr lang="en-US" sz="2400" dirty="0"/>
           </a:p>
@@ -10374,7 +10374,7 @@
                 <a:ea typeface="Calibri" pitchFamily="34" charset="-122"/>
                 <a:cs typeface="Calibri" pitchFamily="34" charset="-120"/>
               </a:rPr>
-              <a:t>B   30</a:t>
+              <a:t>A   30</a:t>
             </a:r>
             <a:endParaRPr lang="en-US" sz="2200" dirty="0"/>
           </a:p>
@@ -10624,7 +10624,7 @@
                 <a:ea typeface="Calibri" pitchFamily="34" charset="-122"/>
                 <a:cs typeface="Calibri" pitchFamily="34" charset="-120"/>
               </a:rPr>
-              <a:t>B   −3</a:t>
+              <a:t>D   −3</a:t>
             </a:r>
             <a:endParaRPr lang="en-US" sz="2200" dirty="0"/>
           </a:p>

--- a/decks/maths-directed/maths-directed_ch5_multiplying-dividing.pptx
+++ b/decks/maths-directed/maths-directed_ch5_multiplying-dividing.pptx
@@ -122,48 +122,48 @@
   <p:extLst>
     <p:ext uri="{521415D9-36F7-43E2-AB2F-B90AF26B5E84}">
       <p14:sectionLst xmlns:p14="http://schemas.microsoft.com/office/powerpoint/2010/main">
-        <p14:section name="Opening" id="{358dae4c-cffb-ad92-00b8-776a2f7ebe2b}">
+        <p14:section name="Opening" id="{a6f66af4-fb2a-3c0d-d9e8-07536fde6396}">
           <p14:sldIdLst>
             <p14:sldId id="256"/>
           </p14:sldIdLst>
         </p14:section>
-        <p14:section name="Gate" id="{978dccb9-9adc-b14b-5989-d0d803ac5a17}">
+        <p14:section name="Gate" id="{2ceaaf33-a43f-178e-d96e-2543238f3caf}">
           <p14:sldIdLst>
             <p14:sldId id="257"/>
             <p14:sldId id="258"/>
           </p14:sldIdLst>
         </p14:section>
-        <p14:section name="Pre-teach" id="{3fe6eed6-612a-f15f-2725-f9e1bbaeb685}">
+        <p14:section name="Pre-teach" id="{fe60ec24-47f8-5320-4990-4e2d3d355b7a}">
           <p14:sldIdLst>
             <p14:sldId id="259"/>
           </p14:sldIdLst>
         </p14:section>
-        <p14:section name="Read-along" id="{a0f80de6-69db-d4d1-c32c-92da55ed4d85}">
+        <p14:section name="Read-along" id="{b2f1c6e5-798a-4c6e-940a-b8eba80d4618}">
           <p14:sldIdLst>
             <p14:sldId id="260"/>
             <p14:sldId id="261"/>
           </p14:sldIdLst>
         </p14:section>
-        <p14:section name="Teach" id="{31f0f699-10b8-2c4d-49ea-71d33337f862}">
+        <p14:section name="Teach" id="{45164dfc-a666-04ff-b1db-593b14f54226}">
           <p14:sldIdLst>
             <p14:sldId id="262"/>
             <p14:sldId id="263"/>
             <p14:sldId id="264"/>
           </p14:sldIdLst>
         </p14:section>
-        <p14:section name="Routes" id="{d13050cc-6e05-cbaa-4be5-72ba346b4ecd}">
+        <p14:section name="Routes" id="{200b5da0-93e3-8186-12ba-561287aa0378}">
           <p14:sldIdLst>
             <p14:sldId id="265"/>
             <p14:sldId id="266"/>
             <p14:sldId id="267"/>
           </p14:sldIdLst>
         </p14:section>
-        <p14:section name="Close" id="{472ba978-8420-d95f-4c6d-55a95a204dd8}">
+        <p14:section name="Close" id="{fb067dab-c3f8-648c-56a4-ce7fb456e647}">
           <p14:sldIdLst>
             <p14:sldId id="268"/>
           </p14:sldIdLst>
         </p14:section>
-        <p14:section name="Answers" id="{ccbc57a1-04c0-dd0a-20b2-25321cb9233d}">
+        <p14:section name="Answers" id="{38c05601-8b00-85f2-f8ae-955aeaaaf262}">
           <p14:sldIdLst>
             <p14:sldId id="269"/>
             <p14:sldId id="270"/>
